--- a/Fluctus_Laadplan_Courcelles.pptx
+++ b/Fluctus_Laadplan_Courcelles.pptx
@@ -13982,7 +13982,46 @@
       </p:sp>
       <p:sp>
         <p:nvSpPr>
-          <p:cNvPr id="171" name="Shape 169"/>
+          <p:cNvPr id="171" name="Text 169"/>
+          <p:cNvSpPr/>
+          <p:nvPr/>
+        </p:nvSpPr>
+        <p:spPr>
+          <a:xfrm>
+            <a:off x="640080" y="6071616"/>
+            <a:ext cx="10058400" cy="237744"/>
+          </a:xfrm>
+          <a:prstGeom prst="rect">
+            <a:avLst/>
+          </a:prstGeom>
+          <a:noFill/>
+          <a:ln/>
+        </p:spPr>
+        <p:txBody>
+          <a:bodyPr wrap="square" lIns="0" tIns="0" rIns="0" bIns="0" rtlCol="0" anchor="ctr"/>
+          <a:lstStyle/>
+          <a:p>
+            <a:pPr indent="0" marL="0">
+              <a:buNone/>
+            </a:pPr>
+            <a:r>
+              <a:rPr lang="en-US" sz="800" i="1" dirty="0">
+                <a:solidFill>
+                  <a:srgbClr val="5A6473"/>
+                </a:solidFill>
+                <a:latin typeface="Arial" pitchFamily="34" charset="0"/>
+                <a:ea typeface="Arial" pitchFamily="34" charset="-122"/>
+                <a:cs typeface="Arial" pitchFamily="34" charset="-120"/>
+              </a:rPr>
+              <a:t>Bron bestaande laadpunten: Departement Mobiliteit en Openbare Werken (Vlaanderen).</a:t>
+            </a:r>
+            <a:endParaRPr lang="en-US" sz="800" dirty="0"/>
+          </a:p>
+        </p:txBody>
+      </p:sp>
+      <p:sp>
+        <p:nvSpPr>
+          <p:cNvPr id="172" name="Shape 170"/>
           <p:cNvSpPr/>
           <p:nvPr/>
         </p:nvSpPr>
@@ -14002,7 +14041,7 @@
       </p:sp>
       <p:pic>
         <p:nvPicPr>
-          <p:cNvPr id="172" name="Image 0" descr="preencoded.png">    </p:cNvPr>
+          <p:cNvPr id="173" name="Image 0" descr="preencoded.png">    </p:cNvPr>
           <p:cNvPicPr>
             <a:picLocks noChangeAspect="1"/>
           </p:cNvPicPr>
@@ -14026,7 +14065,7 @@
       </p:pic>
       <p:sp>
         <p:nvSpPr>
-          <p:cNvPr id="173" name="Text 170"/>
+          <p:cNvPr id="174" name="Text 171"/>
           <p:cNvSpPr/>
           <p:nvPr/>
         </p:nvSpPr>
@@ -14068,7 +14107,7 @@
       </p:sp>
       <p:sp>
         <p:nvSpPr>
-          <p:cNvPr id="174" name="Shape 171"/>
+          <p:cNvPr id="175" name="Shape 172"/>
           <p:cNvSpPr/>
           <p:nvPr/>
         </p:nvSpPr>
@@ -14088,7 +14127,7 @@
       </p:sp>
       <p:pic>
         <p:nvPicPr>
-          <p:cNvPr id="175" name="Image 1" descr="preencoded.png">    </p:cNvPr>
+          <p:cNvPr id="176" name="Image 1" descr="preencoded.png">    </p:cNvPr>
           <p:cNvPicPr>
             <a:picLocks noChangeAspect="1"/>
           </p:cNvPicPr>
@@ -14112,7 +14151,7 @@
       </p:pic>
       <p:sp>
         <p:nvSpPr>
-          <p:cNvPr id="176" name="Text 172"/>
+          <p:cNvPr id="177" name="Text 173"/>
           <p:cNvSpPr/>
           <p:nvPr/>
         </p:nvSpPr>
@@ -14154,7 +14193,7 @@
       </p:sp>
       <p:sp>
         <p:nvSpPr>
-          <p:cNvPr id="177" name="Shape 173"/>
+          <p:cNvPr id="178" name="Shape 174"/>
           <p:cNvSpPr/>
           <p:nvPr/>
         </p:nvSpPr>
@@ -14174,7 +14213,7 @@
       </p:sp>
       <p:pic>
         <p:nvPicPr>
-          <p:cNvPr id="178" name="Image 2" descr="preencoded.png">    </p:cNvPr>
+          <p:cNvPr id="179" name="Image 2" descr="preencoded.png">    </p:cNvPr>
           <p:cNvPicPr>
             <a:picLocks noChangeAspect="1"/>
           </p:cNvPicPr>
@@ -14198,7 +14237,7 @@
       </p:pic>
       <p:sp>
         <p:nvSpPr>
-          <p:cNvPr id="179" name="Text 174"/>
+          <p:cNvPr id="180" name="Text 175"/>
           <p:cNvSpPr/>
           <p:nvPr/>
         </p:nvSpPr>
@@ -14240,7 +14279,7 @@
       </p:sp>
       <p:sp>
         <p:nvSpPr>
-          <p:cNvPr id="180" name="Text 175"/>
+          <p:cNvPr id="181" name="Text 176"/>
           <p:cNvSpPr/>
           <p:nvPr/>
         </p:nvSpPr>
@@ -14279,7 +14318,7 @@
       </p:sp>
       <p:sp>
         <p:nvSpPr>
-          <p:cNvPr id="181" name="Text 176"/>
+          <p:cNvPr id="182" name="Text 177"/>
           <p:cNvSpPr/>
           <p:nvPr/>
         </p:nvSpPr>
